--- a/docs/presentacion/DanyPizzas_Anexos.pptx
+++ b/docs/presentacion/DanyPizzas_Anexos.pptx
@@ -117,7 +117,7 @@
   <p:extLst>
     <p:ext uri="{521415D9-36F7-43E2-AB2F-B90AF26B5E84}">
       <p14:sectionLst xmlns:p14="http://schemas.microsoft.com/office/powerpoint/2010/main">
-        <p14:section name="Anexos" id="{6d34dabb-292a-fc7f-b414-4212a919c767}">
+        <p14:section name="Anexos" id="{56d196aa-6e3a-567a-38fc-3302a5b1164c}">
           <p14:sldIdLst>
             <p14:sldId id="256"/>
             <p14:sldId id="257"/>

--- a/docs/presentacion/DanyPizzas_Anexos.pptx
+++ b/docs/presentacion/DanyPizzas_Anexos.pptx
@@ -117,7 +117,7 @@
   <p:extLst>
     <p:ext uri="{521415D9-36F7-43E2-AB2F-B90AF26B5E84}">
       <p14:sectionLst xmlns:p14="http://schemas.microsoft.com/office/powerpoint/2010/main">
-        <p14:section name="Anexos" id="{56d196aa-6e3a-567a-38fc-3302a5b1164c}">
+        <p14:section name="Anexos" id="{73caa013-f548-5175-af0d-d2f9e134768b}">
           <p14:sldIdLst>
             <p14:sldId id="256"/>
             <p14:sldId id="257"/>
